--- a/documentation/posters/Smart_UTM_poster_A0.pptx
+++ b/documentation/posters/Smart_UTM_poster_A0.pptx
@@ -3731,7 +3731,7 @@
                 </a:solidFill>
                 <a:latin typeface="Calibri"/>
               </a:rPr>
-              <a:t>17</a:t>
+              <a:t>34</a:t>
             </a:r>
           </a:p>
         </p:txBody>
@@ -3792,7 +3792,7 @@
                 </a:solidFill>
                 <a:latin typeface="Calibri"/>
               </a:rPr>
-              <a:t>13 specimens</a:t>
+              <a:t>29 specimens</a:t>
             </a:r>
           </a:p>
         </p:txBody>
@@ -4331,7 +4331,7 @@
                 </a:solidFill>
                 <a:latin typeface="Calibri"/>
               </a:rPr>
-              <a:t>Code, raw CSVs and the full 76-slide technical deck: Software/UTM_PyQt6/ and documentation/  ·  Every figure and number here is regenerated from the rig CSVs by documentation/sf9_data.py — none of it is transcribed by hand.  ·  Layout follows the #evenbetterposter / Generation-2 billboard format: a plain-language headline, with methods and limitations kept as full panels rather than sidebars.</a:t>
+              <a:t>Code, raw CSVs and the full 76-slide technical deck: Software/UTM_PyQt6/ and documentation/  ·  Every figure and number here is regenerated from the rig CSVs by documentation/scripts/sf9_data.py — none of it is transcribed by hand.  ·  Layout follows the #evenbetterposter / Generation-2 billboard format: a plain-language headline, with methods and limitations kept as full panels rather than sidebars.</a:t>
             </a:r>
           </a:p>
         </p:txBody>
@@ -6249,7 +6249,7 @@
                 </a:solidFill>
                 <a:latin typeface="Calibri"/>
               </a:rPr>
-              <a:t>THE SMART FEATURES, SF1 TO SF16</a:t>
+              <a:t>THE SMART FEATURES, SF1 TO SF15</a:t>
             </a:r>
           </a:p>
         </p:txBody>
@@ -12425,7 +12425,7 @@
                 </a:solidFill>
                 <a:latin typeface="Calibri"/>
               </a:rPr>
-              <a:t>17 runs</a:t>
+              <a:t>34 runs</a:t>
             </a:r>
           </a:p>
         </p:txBody>
@@ -12467,7 +12467,7 @@
                 </a:solidFill>
                 <a:latin typeface="Calibri"/>
               </a:rPr>
-              <a:t>auto-indexed, 13 specimens</a:t>
+              <a:t>auto-indexed, 29 specimens</a:t>
             </a:r>
           </a:p>
         </p:txBody>

--- a/documentation/posters/Smart_UTM_poster_A0.pptx
+++ b/documentation/posters/Smart_UTM_poster_A0.pptx
@@ -5147,7 +5147,7 @@
                 </a:solidFill>
                 <a:latin typeface="Calibri"/>
               </a:rPr>
-              <a:t>Load-collapse detector · stall guard (&lt; 0.05 mm / 6 s under load) · 10 kN and 30 mm backstops · dead-DIC guard (freeze at 0.2 s, halt at 1.0 s). Guards are phase-aware, so the stall guard stays silent through an intentional dwell.</a:t>
+              <a:t>Load-collapse detector · stall guard (&lt; 0.05 mm / 6 s under load) · 4.5 kN and 30 mm backstops · dead-DIC guard (freeze at 0.2 s, halt at 1.0 s). Guards are phase-aware, so the stall guard stays silent through an intentional dwell.</a:t>
             </a:r>
           </a:p>
         </p:txBody>
